--- a/decisions/Novagentica-Deel-Decision.pptx
+++ b/decisions/Novagentica-Deel-Decision.pptx
@@ -5405,7 +5405,7 @@
                 <a:ea typeface="Georgia" pitchFamily="34" charset="-122"/>
                 <a:cs typeface="Georgia" pitchFamily="34" charset="-120"/>
               </a:rPr>
-              <a:t>Single-model GO (Claude). Genuine second-model review pending.</a:t>
+              <a:t>Two-model (Claude + Gemini): Deel confirmed. PAUSE on status — clear the 4 diligence items before signing.</a:t>
             </a:r>
             <a:endParaRPr lang="en-US" sz="1450" dirty="0"/>
           </a:p>
